--- a/assets/figures-editable/c1-c2/c2-e19.pptx
+++ b/assets/figures-editable/c1-c2/c2-e19.pptx
@@ -7,7 +7,7 @@
   <p:sldIdLst>
     <p:sldId id="256" r:id="rId7"/>
   </p:sldIdLst>
-  <p:sldSz cx="11948160" cy="7924799" type="screen4x3"/>
+  <p:sldSz cx="12191695" cy="6858000" type="screen4x3"/>
   <p:notesSz cx="6858000" cy="9144000"/>
   <p:defaultTextStyle>
     <a:defPPr>
@@ -3098,14 +3098,14 @@
       <p:grpSpPr/>
       <p:sp>
         <p:nvSpPr>
-          <p:cNvPr id="2" name="text1" descr="sci-ppt:C2-E19-001"/>
+          <p:cNvPr id="2" name="C2-E19 text 0" descr="sci-ppt:o000"/>
           <p:cNvSpPr txBox="1"/>
           <p:nvPr/>
         </p:nvSpPr>
         <p:spPr>
           <a:xfrm>
-            <a:off x="316992" y="268224"/>
-            <a:ext cx="11277600" cy="359054"/>
+            <a:off x="274320" y="118872"/>
+            <a:ext cx="11612880" cy="340105"/>
           </a:xfrm>
           <a:prstGeom prst="rect">
             <a:avLst/>
@@ -3114,7 +3114,7 @@
           <a:effectLst/>
         </p:spPr>
         <p:txBody>
-          <a:bodyPr wrap="none" lIns="27432" rIns="27432" tIns="18288" bIns="18288" anchor="ctr">
+          <a:bodyPr wrap="none" lIns="18288" rIns="18288" tIns="18288" bIns="18288" anchor="t">
             <a:spAutoFit/>
           </a:bodyPr>
           <a:lstStyle/>
@@ -3125,37 +3125,109 @@
               </a:spcAft>
             </a:pPr>
             <a:r>
-              <a:rPr sz="1823" b="0" i="0">
+              <a:rPr sz="1900" b="1" i="0">
                 <a:solidFill>
                   <a:srgbClr val="8EDBD4"/>
                 </a:solidFill>
                 <a:latin typeface="Arial"/>
               </a:rPr>
-              <a:t>C2-E19 | Physical-variable diagram</a:t>
-            </a:r>
-          </a:p>
-        </p:txBody>
-      </p:sp>
-      <p:sp>
-        <p:nvSpPr>
-          <p:cNvPr id="3" name="ellipse2" descr="sci-ppt:C2-E19-002"/>
+              <a:t>C2-E19 · Species phase-mass balance</a:t>
+            </a:r>
+          </a:p>
+        </p:txBody>
+      </p:sp>
+      <p:sp>
+        <p:nvSpPr>
+          <p:cNvPr id="3" name="C2-E19 round_rect 1" descr="sci-ppt:o001"/>
           <p:cNvSpPr/>
           <p:nvPr/>
         </p:nvSpPr>
         <p:spPr>
           <a:xfrm>
-            <a:off x="1767840" y="1219200"/>
-            <a:ext cx="2804160" cy="2804160"/>
+            <a:off x="365760" y="914400"/>
+            <a:ext cx="5852160" cy="4937760"/>
+          </a:xfrm>
+          <a:prstGeom prst="roundRect">
+            <a:avLst/>
+          </a:prstGeom>
+          <a:solidFill>
+            <a:srgbClr val="213E4B"/>
+          </a:solidFill>
+          <a:ln w="20320">
+            <a:solidFill>
+              <a:srgbClr val="8EDBD4"/>
+            </a:solidFill>
+          </a:ln>
+          <a:effectLst/>
+        </p:spPr>
+        <p:txBody>
+          <a:bodyPr rtlCol="0" anchor="ctr"/>
+          <a:lstStyle/>
+          <a:p>
+            <a:pPr algn="ctr"/>
+          </a:p>
+        </p:txBody>
+      </p:sp>
+      <p:sp>
+        <p:nvSpPr>
+          <p:cNvPr id="4" name="C2-E19 text 2" descr="sci-ppt:o002"/>
+          <p:cNvSpPr txBox="1"/>
+          <p:nvPr/>
+        </p:nvSpPr>
+        <p:spPr>
+          <a:xfrm>
+            <a:off x="475488" y="969264"/>
+            <a:ext cx="5632704" cy="254889"/>
+          </a:xfrm>
+          <a:prstGeom prst="rect">
+            <a:avLst/>
+          </a:prstGeom>
+          <a:noFill/>
+          <a:effectLst/>
+        </p:spPr>
+        <p:txBody>
+          <a:bodyPr wrap="none" lIns="18288" rIns="18288" tIns="18288" bIns="18288" anchor="t">
+            <a:spAutoFit/>
+          </a:bodyPr>
+          <a:lstStyle/>
+          <a:p>
+            <a:pPr algn="l">
+              <a:spcAft>
+                <a:spcPts val="0"/>
+              </a:spcAft>
+            </a:pPr>
+            <a:r>
+              <a:rPr sz="1350" b="1" i="0">
+                <a:solidFill>
+                  <a:srgbClr val="8EDBD4"/>
+                </a:solidFill>
+                <a:latin typeface="Arial"/>
+              </a:rPr>
+              <a:t>Which surface evaporates PFC?</a:t>
+            </a:r>
+          </a:p>
+        </p:txBody>
+      </p:sp>
+      <p:sp>
+        <p:nvSpPr>
+          <p:cNvPr id="5" name="C2-E19 ellipse 3" descr="sci-ppt:o003"/>
+          <p:cNvSpPr/>
+          <p:nvPr/>
+        </p:nvSpPr>
+        <p:spPr>
+          <a:xfrm>
+            <a:off x="1645919" y="2103120"/>
+            <a:ext cx="2743200" cy="2743200"/>
           </a:xfrm>
           <a:prstGeom prst="ellipse">
             <a:avLst/>
           </a:prstGeom>
           <a:solidFill>
-            <a:srgbClr val="213E4B"/>
+            <a:srgbClr val="1E4A5A"/>
           </a:solidFill>
-          <a:ln w="21590">
+          <a:ln w="30480">
             <a:solidFill>
-              <a:srgbClr val="B4C7D2"/>
+              <a:srgbClr val="8EDBD4"/>
             </a:solidFill>
           </a:ln>
           <a:effectLst/>
@@ -3170,24 +3242,28 @@
       </p:sp>
       <p:sp>
         <p:nvSpPr>
-          <p:cNvPr id="4" name="ellipse3" descr="sci-ppt:C2-E19-003"/>
+          <p:cNvPr id="6" name="C2-E19 ellipse 4" descr="sci-ppt:o004"/>
           <p:cNvSpPr/>
           <p:nvPr/>
         </p:nvSpPr>
         <p:spPr>
           <a:xfrm>
-            <a:off x="3438144" y="2706624"/>
-            <a:ext cx="926592" cy="926592"/>
+            <a:off x="2743200" y="2194559"/>
+            <a:ext cx="2377440" cy="2377440"/>
           </a:xfrm>
           <a:prstGeom prst="ellipse">
             <a:avLst/>
           </a:prstGeom>
           <a:solidFill>
-            <a:srgbClr val="F6BC77"/>
+            <a:srgbClr val="0C1820">
+              <a:alpha val="95000"/>
+            </a:srgbClr>
           </a:solidFill>
-          <a:ln w="21590">
+          <a:ln w="30480">
             <a:solidFill>
-              <a:srgbClr val="B4C7D2"/>
+              <a:srgbClr val="F2B880">
+                <a:alpha val="95000"/>
+              </a:srgbClr>
             </a:solidFill>
           </a:ln>
           <a:effectLst/>
@@ -3200,21 +3276,585 @@
           </a:p>
         </p:txBody>
       </p:sp>
+      <p:sp>
+        <p:nvSpPr>
+          <p:cNvPr id="7" name="C2-E19 polygon 5" descr="sci-ppt:o005"/>
+          <p:cNvSpPr/>
+          <p:nvPr/>
+        </p:nvSpPr>
+        <p:spPr>
+          <a:xfrm>
+            <a:off x="3627188" y="2246065"/>
+            <a:ext cx="761889" cy="2320914"/>
+          </a:xfrm>
+          <a:custGeom>
+            <a:avLst/>
+            <a:gdLst/>
+            <a:ahLst/>
+            <a:cxnLst/>
+            <a:rect l="l" t="t" r="r" b="b"/>
+            <a:pathLst>
+              <a:path w="761889" h="2320914">
+                <a:moveTo>
+                  <a:pt x="219944" y="2320914"/>
+                </a:moveTo>
+                <a:lnTo>
+                  <a:pt x="237040" y="2307715"/>
+                </a:lnTo>
+                <a:lnTo>
+                  <a:pt x="253927" y="2294248"/>
+                </a:lnTo>
+                <a:lnTo>
+                  <a:pt x="270599" y="2280517"/>
+                </a:lnTo>
+                <a:lnTo>
+                  <a:pt x="287054" y="2266525"/>
+                </a:lnTo>
+                <a:lnTo>
+                  <a:pt x="303285" y="2252276"/>
+                </a:lnTo>
+                <a:lnTo>
+                  <a:pt x="319291" y="2237773"/>
+                </a:lnTo>
+                <a:lnTo>
+                  <a:pt x="335066" y="2223020"/>
+                </a:lnTo>
+                <a:lnTo>
+                  <a:pt x="350607" y="2208021"/>
+                </a:lnTo>
+                <a:lnTo>
+                  <a:pt x="365910" y="2192778"/>
+                </a:lnTo>
+                <a:lnTo>
+                  <a:pt x="380970" y="2177296"/>
+                </a:lnTo>
+                <a:lnTo>
+                  <a:pt x="395785" y="2161579"/>
+                </a:lnTo>
+                <a:lnTo>
+                  <a:pt x="410351" y="2145631"/>
+                </a:lnTo>
+                <a:lnTo>
+                  <a:pt x="424664" y="2129456"/>
+                </a:lnTo>
+                <a:lnTo>
+                  <a:pt x="438721" y="2113057"/>
+                </a:lnTo>
+                <a:lnTo>
+                  <a:pt x="452517" y="2096438"/>
+                </a:lnTo>
+                <a:lnTo>
+                  <a:pt x="466050" y="2079605"/>
+                </a:lnTo>
+                <a:lnTo>
+                  <a:pt x="479316" y="2062560"/>
+                </a:lnTo>
+                <a:lnTo>
+                  <a:pt x="492312" y="2045309"/>
+                </a:lnTo>
+                <a:lnTo>
+                  <a:pt x="505035" y="2027855"/>
+                </a:lnTo>
+                <a:lnTo>
+                  <a:pt x="517482" y="2010203"/>
+                </a:lnTo>
+                <a:lnTo>
+                  <a:pt x="529649" y="1992357"/>
+                </a:lnTo>
+                <a:lnTo>
+                  <a:pt x="541534" y="1974322"/>
+                </a:lnTo>
+                <a:lnTo>
+                  <a:pt x="553133" y="1956102"/>
+                </a:lnTo>
+                <a:lnTo>
+                  <a:pt x="564443" y="1937702"/>
+                </a:lnTo>
+                <a:lnTo>
+                  <a:pt x="575463" y="1919126"/>
+                </a:lnTo>
+                <a:lnTo>
+                  <a:pt x="586189" y="1900378"/>
+                </a:lnTo>
+                <a:lnTo>
+                  <a:pt x="596618" y="1881464"/>
+                </a:lnTo>
+                <a:lnTo>
+                  <a:pt x="606748" y="1862388"/>
+                </a:lnTo>
+                <a:lnTo>
+                  <a:pt x="616576" y="1843155"/>
+                </a:lnTo>
+                <a:lnTo>
+                  <a:pt x="626100" y="1823769"/>
+                </a:lnTo>
+                <a:lnTo>
+                  <a:pt x="635318" y="1804236"/>
+                </a:lnTo>
+                <a:lnTo>
+                  <a:pt x="644227" y="1784561"/>
+                </a:lnTo>
+                <a:lnTo>
+                  <a:pt x="652826" y="1764747"/>
+                </a:lnTo>
+                <a:lnTo>
+                  <a:pt x="661111" y="1744800"/>
+                </a:lnTo>
+                <a:lnTo>
+                  <a:pt x="669081" y="1724726"/>
+                </a:lnTo>
+                <a:lnTo>
+                  <a:pt x="676734" y="1704528"/>
+                </a:lnTo>
+                <a:lnTo>
+                  <a:pt x="684068" y="1684213"/>
+                </a:lnTo>
+                <a:lnTo>
+                  <a:pt x="691081" y="1663784"/>
+                </a:lnTo>
+                <a:lnTo>
+                  <a:pt x="697771" y="1643248"/>
+                </a:lnTo>
+                <a:lnTo>
+                  <a:pt x="704138" y="1622609"/>
+                </a:lnTo>
+                <a:lnTo>
+                  <a:pt x="710178" y="1601872"/>
+                </a:lnTo>
+                <a:lnTo>
+                  <a:pt x="715892" y="1581042"/>
+                </a:lnTo>
+                <a:lnTo>
+                  <a:pt x="721276" y="1560125"/>
+                </a:lnTo>
+                <a:lnTo>
+                  <a:pt x="726331" y="1539126"/>
+                </a:lnTo>
+                <a:lnTo>
+                  <a:pt x="731054" y="1518050"/>
+                </a:lnTo>
+                <a:lnTo>
+                  <a:pt x="735445" y="1496902"/>
+                </a:lnTo>
+                <a:lnTo>
+                  <a:pt x="739502" y="1475688"/>
+                </a:lnTo>
+                <a:lnTo>
+                  <a:pt x="743225" y="1454412"/>
+                </a:lnTo>
+                <a:lnTo>
+                  <a:pt x="746612" y="1433081"/>
+                </a:lnTo>
+                <a:lnTo>
+                  <a:pt x="749663" y="1411699"/>
+                </a:lnTo>
+                <a:lnTo>
+                  <a:pt x="752377" y="1390271"/>
+                </a:lnTo>
+                <a:lnTo>
+                  <a:pt x="754753" y="1368803"/>
+                </a:lnTo>
+                <a:lnTo>
+                  <a:pt x="756790" y="1347301"/>
+                </a:lnTo>
+                <a:lnTo>
+                  <a:pt x="758489" y="1325769"/>
+                </a:lnTo>
+                <a:lnTo>
+                  <a:pt x="759849" y="1304213"/>
+                </a:lnTo>
+                <a:lnTo>
+                  <a:pt x="760869" y="1282638"/>
+                </a:lnTo>
+                <a:lnTo>
+                  <a:pt x="761549" y="1261050"/>
+                </a:lnTo>
+                <a:lnTo>
+                  <a:pt x="761889" y="1239454"/>
+                </a:lnTo>
+                <a:lnTo>
+                  <a:pt x="761889" y="1217855"/>
+                </a:lnTo>
+                <a:lnTo>
+                  <a:pt x="761549" y="1196259"/>
+                </a:lnTo>
+                <a:lnTo>
+                  <a:pt x="760869" y="1174671"/>
+                </a:lnTo>
+                <a:lnTo>
+                  <a:pt x="759849" y="1153096"/>
+                </a:lnTo>
+                <a:lnTo>
+                  <a:pt x="758489" y="1131540"/>
+                </a:lnTo>
+                <a:lnTo>
+                  <a:pt x="756790" y="1110008"/>
+                </a:lnTo>
+                <a:lnTo>
+                  <a:pt x="754753" y="1088506"/>
+                </a:lnTo>
+                <a:lnTo>
+                  <a:pt x="752377" y="1067038"/>
+                </a:lnTo>
+                <a:lnTo>
+                  <a:pt x="749663" y="1045610"/>
+                </a:lnTo>
+                <a:lnTo>
+                  <a:pt x="746612" y="1024228"/>
+                </a:lnTo>
+                <a:lnTo>
+                  <a:pt x="743225" y="1002897"/>
+                </a:lnTo>
+                <a:lnTo>
+                  <a:pt x="739502" y="981621"/>
+                </a:lnTo>
+                <a:lnTo>
+                  <a:pt x="735445" y="960407"/>
+                </a:lnTo>
+                <a:lnTo>
+                  <a:pt x="731054" y="939259"/>
+                </a:lnTo>
+                <a:lnTo>
+                  <a:pt x="726331" y="918183"/>
+                </a:lnTo>
+                <a:lnTo>
+                  <a:pt x="721276" y="897184"/>
+                </a:lnTo>
+                <a:lnTo>
+                  <a:pt x="715892" y="876267"/>
+                </a:lnTo>
+                <a:lnTo>
+                  <a:pt x="710178" y="855437"/>
+                </a:lnTo>
+                <a:lnTo>
+                  <a:pt x="704138" y="834700"/>
+                </a:lnTo>
+                <a:lnTo>
+                  <a:pt x="697771" y="814061"/>
+                </a:lnTo>
+                <a:lnTo>
+                  <a:pt x="691081" y="793525"/>
+                </a:lnTo>
+                <a:lnTo>
+                  <a:pt x="684068" y="773096"/>
+                </a:lnTo>
+                <a:lnTo>
+                  <a:pt x="676734" y="752781"/>
+                </a:lnTo>
+                <a:lnTo>
+                  <a:pt x="669081" y="732583"/>
+                </a:lnTo>
+                <a:lnTo>
+                  <a:pt x="661111" y="712509"/>
+                </a:lnTo>
+                <a:lnTo>
+                  <a:pt x="652826" y="692562"/>
+                </a:lnTo>
+                <a:lnTo>
+                  <a:pt x="644227" y="672748"/>
+                </a:lnTo>
+                <a:lnTo>
+                  <a:pt x="635318" y="653073"/>
+                </a:lnTo>
+                <a:lnTo>
+                  <a:pt x="626100" y="633540"/>
+                </a:lnTo>
+                <a:lnTo>
+                  <a:pt x="616576" y="614154"/>
+                </a:lnTo>
+                <a:lnTo>
+                  <a:pt x="606748" y="594921"/>
+                </a:lnTo>
+                <a:lnTo>
+                  <a:pt x="596618" y="575845"/>
+                </a:lnTo>
+                <a:lnTo>
+                  <a:pt x="586189" y="556931"/>
+                </a:lnTo>
+                <a:lnTo>
+                  <a:pt x="575463" y="538183"/>
+                </a:lnTo>
+                <a:lnTo>
+                  <a:pt x="564443" y="519607"/>
+                </a:lnTo>
+                <a:lnTo>
+                  <a:pt x="553133" y="501207"/>
+                </a:lnTo>
+                <a:lnTo>
+                  <a:pt x="541534" y="482987"/>
+                </a:lnTo>
+                <a:lnTo>
+                  <a:pt x="529649" y="464952"/>
+                </a:lnTo>
+                <a:lnTo>
+                  <a:pt x="517482" y="447106"/>
+                </a:lnTo>
+                <a:lnTo>
+                  <a:pt x="505035" y="429454"/>
+                </a:lnTo>
+                <a:lnTo>
+                  <a:pt x="492312" y="412000"/>
+                </a:lnTo>
+                <a:lnTo>
+                  <a:pt x="479316" y="394749"/>
+                </a:lnTo>
+                <a:lnTo>
+                  <a:pt x="466050" y="377704"/>
+                </a:lnTo>
+                <a:lnTo>
+                  <a:pt x="452517" y="360871"/>
+                </a:lnTo>
+                <a:lnTo>
+                  <a:pt x="438721" y="344252"/>
+                </a:lnTo>
+                <a:lnTo>
+                  <a:pt x="424664" y="327853"/>
+                </a:lnTo>
+                <a:lnTo>
+                  <a:pt x="410351" y="311678"/>
+                </a:lnTo>
+                <a:lnTo>
+                  <a:pt x="395785" y="295730"/>
+                </a:lnTo>
+                <a:lnTo>
+                  <a:pt x="380970" y="280013"/>
+                </a:lnTo>
+                <a:lnTo>
+                  <a:pt x="365910" y="264531"/>
+                </a:lnTo>
+                <a:lnTo>
+                  <a:pt x="350607" y="249288"/>
+                </a:lnTo>
+                <a:lnTo>
+                  <a:pt x="335066" y="234289"/>
+                </a:lnTo>
+                <a:lnTo>
+                  <a:pt x="319291" y="219536"/>
+                </a:lnTo>
+                <a:lnTo>
+                  <a:pt x="303285" y="205033"/>
+                </a:lnTo>
+                <a:lnTo>
+                  <a:pt x="287054" y="190784"/>
+                </a:lnTo>
+                <a:lnTo>
+                  <a:pt x="270599" y="176792"/>
+                </a:lnTo>
+                <a:lnTo>
+                  <a:pt x="253927" y="163061"/>
+                </a:lnTo>
+                <a:lnTo>
+                  <a:pt x="237040" y="149594"/>
+                </a:lnTo>
+                <a:lnTo>
+                  <a:pt x="219944" y="136395"/>
+                </a:lnTo>
+                <a:lnTo>
+                  <a:pt x="202641" y="123467"/>
+                </a:lnTo>
+                <a:lnTo>
+                  <a:pt x="185138" y="110813"/>
+                </a:lnTo>
+                <a:lnTo>
+                  <a:pt x="167437" y="98436"/>
+                </a:lnTo>
+                <a:lnTo>
+                  <a:pt x="149543" y="86339"/>
+                </a:lnTo>
+                <a:lnTo>
+                  <a:pt x="131461" y="74526"/>
+                </a:lnTo>
+                <a:lnTo>
+                  <a:pt x="113196" y="62999"/>
+                </a:lnTo>
+                <a:lnTo>
+                  <a:pt x="94751" y="51760"/>
+                </a:lnTo>
+                <a:lnTo>
+                  <a:pt x="76132" y="40814"/>
+                </a:lnTo>
+                <a:lnTo>
+                  <a:pt x="57342" y="30162"/>
+                </a:lnTo>
+                <a:lnTo>
+                  <a:pt x="38387" y="19808"/>
+                </a:lnTo>
+                <a:lnTo>
+                  <a:pt x="19271" y="9753"/>
+                </a:lnTo>
+                <a:lnTo>
+                  <a:pt x="0" y="0"/>
+                </a:lnTo>
+              </a:path>
+            </a:pathLst>
+          </a:custGeom>
+          <a:noFill/>
+          <a:ln w="63500">
+            <a:solidFill>
+              <a:srgbClr val="F28BA0"/>
+            </a:solidFill>
+          </a:ln>
+          <a:effectLst/>
+        </p:spPr>
+        <p:txBody>
+          <a:bodyPr rtlCol="0" anchor="ctr"/>
+          <a:lstStyle/>
+          <a:p>
+            <a:pPr algn="ctr"/>
+          </a:p>
+        </p:txBody>
+      </p:sp>
+      <p:sp>
+        <p:nvSpPr>
+          <p:cNvPr id="8" name="C2-E19 text 6" descr="sci-ppt:o006"/>
+          <p:cNvSpPr txBox="1"/>
+          <p:nvPr/>
+        </p:nvSpPr>
+        <p:spPr>
+          <a:xfrm>
+            <a:off x="4480560" y="4617720"/>
+            <a:ext cx="1828800" cy="402081"/>
+          </a:xfrm>
+          <a:prstGeom prst="rect">
+            <a:avLst/>
+          </a:prstGeom>
+          <a:noFill/>
+          <a:effectLst/>
+        </p:spPr>
+        <p:txBody>
+          <a:bodyPr wrap="none" lIns="18288" rIns="18288" tIns="18288" bIns="18288" anchor="t">
+            <a:spAutoFit/>
+          </a:bodyPr>
+          <a:lstStyle/>
+          <a:p>
+            <a:pPr algn="l">
+              <a:spcAft>
+                <a:spcPts val="0"/>
+              </a:spcAft>
+            </a:pPr>
+            <a:r>
+              <a:rPr sz="1150" b="1" i="0">
+                <a:solidFill>
+                  <a:srgbClr val="F28BA0"/>
+                </a:solidFill>
+                <a:latin typeface="Arial"/>
+              </a:rPr>
+              <a:t>Γₛ: droplet surface</a:t>
+            </a:r>
+          </a:p>
+          <a:p>
+            <a:pPr algn="l">
+              <a:spcAft>
+                <a:spcPts val="0"/>
+              </a:spcAft>
+            </a:pPr>
+            <a:r>
+              <a:rPr sz="1150" b="1" i="0">
+                <a:solidFill>
+                  <a:srgbClr val="F28BA0"/>
+                </a:solidFill>
+                <a:latin typeface="Arial"/>
+              </a:rPr>
+              <a:t>in contact with vapor</a:t>
+            </a:r>
+          </a:p>
+        </p:txBody>
+      </p:sp>
+      <p:sp>
+        <p:nvSpPr>
+          <p:cNvPr id="9" name="C2-E19 text 7" descr="sci-ppt:o007"/>
+          <p:cNvSpPr txBox="1"/>
+          <p:nvPr/>
+        </p:nvSpPr>
+        <p:spPr>
+          <a:xfrm>
+            <a:off x="1188720" y="1828800"/>
+            <a:ext cx="2286000" cy="239395"/>
+          </a:xfrm>
+          <a:prstGeom prst="rect">
+            <a:avLst/>
+          </a:prstGeom>
+          <a:noFill/>
+          <a:effectLst/>
+        </p:spPr>
+        <p:txBody>
+          <a:bodyPr wrap="none" lIns="18288" rIns="18288" tIns="18288" bIns="18288" anchor="t">
+            <a:spAutoFit/>
+          </a:bodyPr>
+          <a:lstStyle/>
+          <a:p>
+            <a:pPr algn="l">
+              <a:spcAft>
+                <a:spcPts val="0"/>
+              </a:spcAft>
+            </a:pPr>
+            <a:r>
+              <a:rPr sz="1250" b="1" i="0">
+                <a:solidFill>
+                  <a:srgbClr val="8EDBD4"/>
+                </a:solidFill>
+                <a:latin typeface="Arial"/>
+              </a:rPr>
+              <a:t>PFC droplet</a:t>
+            </a:r>
+          </a:p>
+        </p:txBody>
+      </p:sp>
+      <p:sp>
+        <p:nvSpPr>
+          <p:cNvPr id="10" name="C2-E19 text 8" descr="sci-ppt:o008"/>
+          <p:cNvSpPr txBox="1"/>
+          <p:nvPr/>
+        </p:nvSpPr>
+        <p:spPr>
+          <a:xfrm>
+            <a:off x="3566160" y="1828800"/>
+            <a:ext cx="2377440" cy="239395"/>
+          </a:xfrm>
+          <a:prstGeom prst="rect">
+            <a:avLst/>
+          </a:prstGeom>
+          <a:noFill/>
+          <a:effectLst/>
+        </p:spPr>
+        <p:txBody>
+          <a:bodyPr wrap="none" lIns="18288" rIns="18288" tIns="18288" bIns="18288" anchor="t">
+            <a:spAutoFit/>
+          </a:bodyPr>
+          <a:lstStyle/>
+          <a:p>
+            <a:pPr algn="l">
+              <a:spcAft>
+                <a:spcPts val="0"/>
+              </a:spcAft>
+            </a:pPr>
+            <a:r>
+              <a:rPr sz="1250" b="1" i="0">
+                <a:solidFill>
+                  <a:srgbClr val="F2B880"/>
+                </a:solidFill>
+                <a:latin typeface="Arial"/>
+              </a:rPr>
+              <a:t>vapor bubble</a:t>
+            </a:r>
+          </a:p>
+        </p:txBody>
+      </p:sp>
       <p:cxnSp>
         <p:nvCxnSpPr>
-          <p:cNvPr id="5" name="arrow4" descr="sci-ppt:C2-E19-004"/>
+          <p:cNvPr id="11" name="C2-E19 arrow 9" descr="sci-ppt:o009"/>
           <p:cNvCxnSpPr/>
           <p:nvPr/>
         </p:nvCxnSpPr>
         <p:spPr>
-          <a:xfrm flipV="1">
-            <a:off x="4023360" y="1767840"/>
-            <a:ext cx="975360" cy="1036320"/>
+          <a:xfrm flipH="1">
+            <a:off x="1920240" y="3383280"/>
+            <a:ext cx="365760" cy="0"/>
           </a:xfrm>
           <a:prstGeom prst="line">
             <a:avLst/>
           </a:prstGeom>
-          <a:ln w="25400">
+          <a:ln w="38100">
             <a:solidFill>
               <a:srgbClr val="8EDBD4"/>
             </a:solidFill>
@@ -3226,14 +3866,14 @@
       </p:cxnSp>
       <p:sp>
         <p:nvSpPr>
-          <p:cNvPr id="6" name="text5" descr="sci-ppt:C2-E19-005"/>
+          <p:cNvPr id="12" name="C2-E19 text 10" descr="sci-ppt:o010"/>
           <p:cNvSpPr txBox="1"/>
           <p:nvPr/>
         </p:nvSpPr>
         <p:spPr>
           <a:xfrm>
-            <a:off x="5364480" y="1645920"/>
-            <a:ext cx="5730240" cy="377952"/>
+            <a:off x="502920" y="5074920"/>
+            <a:ext cx="5577840" cy="433070"/>
           </a:xfrm>
           <a:prstGeom prst="rect">
             <a:avLst/>
@@ -3242,7 +3882,7 @@
           <a:effectLst/>
         </p:spPr>
         <p:txBody>
-          <a:bodyPr wrap="none" lIns="27432" rIns="27432" tIns="18288" bIns="18288" anchor="ctr">
+          <a:bodyPr wrap="none" lIns="18288" rIns="18288" tIns="18288" bIns="18288" anchor="t">
             <a:spAutoFit/>
           </a:bodyPr>
           <a:lstStyle/>
@@ -3253,27 +3893,75 @@
               </a:spcAft>
             </a:pPr>
             <a:r>
-              <a:rPr sz="1920" b="0" i="0">
+              <a:rPr sz="1250" b="0" i="0">
                 <a:solidFill>
                   <a:srgbClr val="E7F0F3"/>
                 </a:solidFill>
                 <a:latin typeface="Arial"/>
               </a:rPr>
-              <a:t>Actual PFC contact patch Gamma_s</a:t>
-            </a:r>
-          </a:p>
-        </p:txBody>
-      </p:sp>
-      <p:sp>
-        <p:nvSpPr>
-          <p:cNvPr id="7" name="text6" descr="sci-ppt:C2-E19-006"/>
+              <a:t>Evaporation occurs on the part of the droplet surface that touches</a:t>
+            </a:r>
+          </a:p>
+          <a:p>
+            <a:pPr algn="l">
+              <a:spcAft>
+                <a:spcPts val="0"/>
+              </a:spcAft>
+            </a:pPr>
+            <a:r>
+              <a:rPr sz="1250" b="0" i="0">
+                <a:solidFill>
+                  <a:srgbClr val="E7F0F3"/>
+                </a:solidFill>
+                <a:latin typeface="Arial"/>
+              </a:rPr>
+              <a:t>vapor, Γₛ. It need not coincide with the whole bubble surface.</a:t>
+            </a:r>
+          </a:p>
+        </p:txBody>
+      </p:sp>
+      <p:sp>
+        <p:nvSpPr>
+          <p:cNvPr id="13" name="C2-E19 round_rect 11" descr="sci-ppt:o011"/>
+          <p:cNvSpPr/>
+          <p:nvPr/>
+        </p:nvSpPr>
+        <p:spPr>
+          <a:xfrm>
+            <a:off x="6492240" y="914400"/>
+            <a:ext cx="5349240" cy="4937760"/>
+          </a:xfrm>
+          <a:prstGeom prst="roundRect">
+            <a:avLst/>
+          </a:prstGeom>
+          <a:solidFill>
+            <a:srgbClr val="213E4B"/>
+          </a:solidFill>
+          <a:ln w="20320">
+            <a:solidFill>
+              <a:srgbClr val="8EDBD4"/>
+            </a:solidFill>
+          </a:ln>
+          <a:effectLst/>
+        </p:spPr>
+        <p:txBody>
+          <a:bodyPr rtlCol="0" anchor="ctr"/>
+          <a:lstStyle/>
+          <a:p>
+            <a:pPr algn="ctr"/>
+          </a:p>
+        </p:txBody>
+      </p:sp>
+      <p:sp>
+        <p:nvSpPr>
+          <p:cNvPr id="14" name="C2-E19 text 12" descr="sci-ppt:o012"/>
           <p:cNvSpPr txBox="1"/>
           <p:nvPr/>
         </p:nvSpPr>
         <p:spPr>
           <a:xfrm>
-            <a:off x="5486400" y="2682240"/>
-            <a:ext cx="5730240" cy="340156"/>
+            <a:off x="6601968" y="969264"/>
+            <a:ext cx="5129783" cy="254889"/>
           </a:xfrm>
           <a:prstGeom prst="rect">
             <a:avLst/>
@@ -3282,7 +3970,7 @@
           <a:effectLst/>
         </p:spPr>
         <p:txBody>
-          <a:bodyPr wrap="none" lIns="27432" rIns="27432" tIns="18288" bIns="18288" anchor="ctr">
+          <a:bodyPr wrap="none" lIns="18288" rIns="18288" tIns="18288" bIns="18288" anchor="t">
             <a:spAutoFit/>
           </a:bodyPr>
           <a:lstStyle/>
@@ -3293,27 +3981,27 @@
               </a:spcAft>
             </a:pPr>
             <a:r>
-              <a:rPr sz="1728" b="0" i="0">
+              <a:rPr sz="1350" b="1" i="0">
                 <a:solidFill>
-                  <a:srgbClr val="E7F0F3"/>
+                  <a:srgbClr val="8EDBD4"/>
                 </a:solidFill>
                 <a:latin typeface="Arial"/>
               </a:rPr>
-              <a:t>Full 4π R² requires complete contact.</a:t>
-            </a:r>
-          </a:p>
-        </p:txBody>
-      </p:sp>
-      <p:sp>
-        <p:nvSpPr>
-          <p:cNvPr id="8" name="text7" descr="sci-ppt:C2-E19-007"/>
+              <a:t>Mass balance of species s</a:t>
+            </a:r>
+          </a:p>
+        </p:txBody>
+      </p:sp>
+      <p:sp>
+        <p:nvSpPr>
+          <p:cNvPr id="15" name="C2-E19 text 13" descr="sci-ppt:o013"/>
           <p:cNvSpPr txBox="1"/>
           <p:nvPr/>
         </p:nvSpPr>
         <p:spPr>
           <a:xfrm>
-            <a:off x="1584960" y="4267200"/>
-            <a:ext cx="9753600" cy="359054"/>
+            <a:off x="6629400" y="1371600"/>
+            <a:ext cx="5120640" cy="262636"/>
           </a:xfrm>
           <a:prstGeom prst="rect">
             <a:avLst/>
@@ -3322,7 +4010,7 @@
           <a:effectLst/>
         </p:spPr>
         <p:txBody>
-          <a:bodyPr wrap="none" lIns="27432" rIns="27432" tIns="18288" bIns="18288" anchor="ctr">
+          <a:bodyPr wrap="none" lIns="18288" rIns="18288" tIns="18288" bIns="18288" anchor="t">
             <a:spAutoFit/>
           </a:bodyPr>
           <a:lstStyle/>
@@ -3333,27 +4021,27 @@
               </a:spcAft>
             </a:pPr>
             <a:r>
-              <a:rPr sz="1823" b="0" i="0">
+              <a:rPr sz="1400" b="1" i="0">
                 <a:solidFill>
                   <a:srgbClr val="E7F0F3"/>
                 </a:solidFill>
                 <a:latin typeface="Arial"/>
               </a:rPr>
-              <a:t>Bubble boundary and PFC evaporation surface can differ.</a:t>
-            </a:r>
-          </a:p>
-        </p:txBody>
-      </p:sp>
-      <p:sp>
-        <p:nvSpPr>
-          <p:cNvPr id="9" name="text8" descr="sci-ppt:C2-E19-008"/>
+              <a:t>ṁᵥ,s |phase = ∫ over Γₛ of jₛ dA</a:t>
+            </a:r>
+          </a:p>
+        </p:txBody>
+      </p:sp>
+      <p:sp>
+        <p:nvSpPr>
+          <p:cNvPr id="16" name="C2-E19 text 14" descr="sci-ppt:o014"/>
           <p:cNvSpPr txBox="1"/>
           <p:nvPr/>
         </p:nvSpPr>
         <p:spPr>
           <a:xfrm>
-            <a:off x="365760" y="4974336"/>
-            <a:ext cx="5547360" cy="321259"/>
+            <a:off x="6629400" y="2011680"/>
+            <a:ext cx="5120640" cy="239395"/>
           </a:xfrm>
           <a:prstGeom prst="rect">
             <a:avLst/>
@@ -3362,7 +4050,7 @@
           <a:effectLst/>
         </p:spPr>
         <p:txBody>
-          <a:bodyPr wrap="none" lIns="27432" rIns="27432" tIns="18288" bIns="18288" anchor="ctr">
+          <a:bodyPr wrap="none" lIns="18288" rIns="18288" tIns="18288" bIns="18288" anchor="t">
             <a:spAutoFit/>
           </a:bodyPr>
           <a:lstStyle/>
@@ -3373,27 +4061,59 @@
               </a:spcAft>
             </a:pPr>
             <a:r>
-              <a:rPr sz="1632" b="0" i="0">
+              <a:rPr sz="1250" b="0" i="0">
                 <a:solidFill>
-                  <a:srgbClr val="E7F0F3"/>
+                  <a:srgbClr val="B4C7D2"/>
                 </a:solidFill>
                 <a:latin typeface="Arial"/>
               </a:rPr>
-              <a:t>Γ_s: actual species interface</a:t>
-            </a:r>
-          </a:p>
-        </p:txBody>
-      </p:sp>
-      <p:sp>
-        <p:nvSpPr>
-          <p:cNvPr id="10" name="text9" descr="sci-ppt:C2-E19-009"/>
+              <a:t>jₛ: signed liquid-to-vapor mass flux (kg m⁻² s⁻¹)</a:t>
+            </a:r>
+          </a:p>
+        </p:txBody>
+      </p:sp>
+      <p:sp>
+        <p:nvSpPr>
+          <p:cNvPr id="17" name="C2-E19 round_rect 15" descr="sci-ppt:o015"/>
+          <p:cNvSpPr/>
+          <p:nvPr/>
+        </p:nvSpPr>
+        <p:spPr>
+          <a:xfrm>
+            <a:off x="6629400" y="2606040"/>
+            <a:ext cx="5074920" cy="1417320"/>
+          </a:xfrm>
+          <a:prstGeom prst="roundRect">
+            <a:avLst/>
+          </a:prstGeom>
+          <a:solidFill>
+            <a:srgbClr val="213E4B"/>
+          </a:solidFill>
+          <a:ln w="20320">
+            <a:solidFill>
+              <a:srgbClr val="F2B880"/>
+            </a:solidFill>
+          </a:ln>
+          <a:effectLst/>
+        </p:spPr>
+        <p:txBody>
+          <a:bodyPr rtlCol="0" anchor="ctr"/>
+          <a:lstStyle/>
+          <a:p>
+            <a:pPr algn="ctr"/>
+          </a:p>
+        </p:txBody>
+      </p:sp>
+      <p:sp>
+        <p:nvSpPr>
+          <p:cNvPr id="18" name="C2-E19 text 16" descr="sci-ppt:o016"/>
           <p:cNvSpPr txBox="1"/>
           <p:nvPr/>
         </p:nvSpPr>
         <p:spPr>
           <a:xfrm>
-            <a:off x="365760" y="5266944"/>
-            <a:ext cx="5547360" cy="321259"/>
+            <a:off x="6766560" y="2679192"/>
+            <a:ext cx="4846320" cy="247142"/>
           </a:xfrm>
           <a:prstGeom prst="rect">
             <a:avLst/>
@@ -3402,7 +4122,7 @@
           <a:effectLst/>
         </p:spPr>
         <p:txBody>
-          <a:bodyPr wrap="none" lIns="27432" rIns="27432" tIns="18288" bIns="18288" anchor="ctr">
+          <a:bodyPr wrap="none" lIns="18288" rIns="18288" tIns="18288" bIns="18288" anchor="t">
             <a:spAutoFit/>
           </a:bodyPr>
           <a:lstStyle/>
@@ -3413,27 +4133,27 @@
               </a:spcAft>
             </a:pPr>
             <a:r>
-              <a:rPr sz="1632" b="0" i="0">
+              <a:rPr sz="1300" b="1" i="0">
                 <a:solidFill>
-                  <a:srgbClr val="E7F0F3"/>
+                  <a:srgbClr val="F2B880"/>
                 </a:solidFill>
                 <a:latin typeface="Arial"/>
               </a:rPr>
-              <a:t>m_v,s, ṁ_v,s: vapor inventory and rate</a:t>
-            </a:r>
-          </a:p>
-        </p:txBody>
-      </p:sp>
-      <p:sp>
-        <p:nvSpPr>
-          <p:cNvPr id="11" name="text10" descr="sci-ppt:C2-E19-010"/>
+              <a:t>Special case only</a:t>
+            </a:r>
+          </a:p>
+        </p:txBody>
+      </p:sp>
+      <p:sp>
+        <p:nvSpPr>
+          <p:cNvPr id="19" name="C2-E19 text 17" descr="sci-ppt:o017"/>
           <p:cNvSpPr txBox="1"/>
           <p:nvPr/>
         </p:nvSpPr>
         <p:spPr>
           <a:xfrm>
-            <a:off x="365760" y="5559552"/>
-            <a:ext cx="5547360" cy="321259"/>
+            <a:off x="6766560" y="3063240"/>
+            <a:ext cx="4846320" cy="433070"/>
           </a:xfrm>
           <a:prstGeom prst="rect">
             <a:avLst/>
@@ -3442,7 +4162,7 @@
           <a:effectLst/>
         </p:spPr>
         <p:txBody>
-          <a:bodyPr wrap="none" lIns="27432" rIns="27432" tIns="18288" bIns="18288" anchor="ctr">
+          <a:bodyPr wrap="none" lIns="18288" rIns="18288" tIns="18288" bIns="18288" anchor="t">
             <a:spAutoFit/>
           </a:bodyPr>
           <a:lstStyle/>
@@ -3453,27 +4173,43 @@
               </a:spcAft>
             </a:pPr>
             <a:r>
-              <a:rPr sz="1632" b="0" i="0">
+              <a:rPr sz="1250" b="0" i="0">
                 <a:solidFill>
                   <a:srgbClr val="E7F0F3"/>
                 </a:solidFill>
                 <a:latin typeface="Arial"/>
               </a:rPr>
-              <a:t>dA: contacted surface patch</a:t>
-            </a:r>
-          </a:p>
-        </p:txBody>
-      </p:sp>
-      <p:sp>
-        <p:nvSpPr>
-          <p:cNvPr id="12" name="text11" descr="sci-ppt:C2-E19-011"/>
+              <a:t>ṁ = 4πR² jₛ   when the whole spherical bubble wall of</a:t>
+            </a:r>
+          </a:p>
+          <a:p>
+            <a:pPr algn="l">
+              <a:spcAft>
+                <a:spcPts val="0"/>
+              </a:spcAft>
+            </a:pPr>
+            <a:r>
+              <a:rPr sz="1250" b="0" i="0">
+                <a:solidFill>
+                  <a:srgbClr val="E7F0F3"/>
+                </a:solidFill>
+                <a:latin typeface="Arial"/>
+              </a:rPr>
+              <a:t>radius R is in uniform contact with the PFC.</a:t>
+            </a:r>
+          </a:p>
+        </p:txBody>
+      </p:sp>
+      <p:sp>
+        <p:nvSpPr>
+          <p:cNvPr id="20" name="C2-E19 text 18" descr="sci-ppt:o018"/>
           <p:cNvSpPr txBox="1"/>
           <p:nvPr/>
         </p:nvSpPr>
         <p:spPr>
           <a:xfrm>
-            <a:off x="6156960" y="4974336"/>
-            <a:ext cx="5547360" cy="321259"/>
+            <a:off x="6629400" y="4251960"/>
+            <a:ext cx="5120640" cy="433070"/>
           </a:xfrm>
           <a:prstGeom prst="rect">
             <a:avLst/>
@@ -3482,7 +4218,7 @@
           <a:effectLst/>
         </p:spPr>
         <p:txBody>
-          <a:bodyPr wrap="none" lIns="27432" rIns="27432" tIns="18288" bIns="18288" anchor="ctr">
+          <a:bodyPr wrap="none" lIns="18288" rIns="18288" tIns="18288" bIns="18288" anchor="t">
             <a:spAutoFit/>
           </a:bodyPr>
           <a:lstStyle/>
@@ -3493,27 +4229,43 @@
               </a:spcAft>
             </a:pPr>
             <a:r>
-              <a:rPr sz="1632" b="0" i="0">
+              <a:rPr sz="1250" b="0" i="0">
                 <a:solidFill>
                   <a:srgbClr val="E7F0F3"/>
                 </a:solidFill>
                 <a:latin typeface="Arial"/>
               </a:rPr>
-              <a:t>j_s: liquid → vapor</a:t>
-            </a:r>
-          </a:p>
-        </p:txBody>
-      </p:sp>
-      <p:sp>
-        <p:nvSpPr>
-          <p:cNvPr id="13" name="text12" descr="sci-ppt:C2-E19-012"/>
+              <a:t>Phase change is only one term: escape and dissolution are</a:t>
+            </a:r>
+          </a:p>
+          <a:p>
+            <a:pPr algn="l">
+              <a:spcAft>
+                <a:spcPts val="0"/>
+              </a:spcAft>
+            </a:pPr>
+            <a:r>
+              <a:rPr sz="1250" b="0" i="0">
+                <a:solidFill>
+                  <a:srgbClr val="E7F0F3"/>
+                </a:solidFill>
+                <a:latin typeface="Arial"/>
+              </a:rPr>
+              <a:t>accounted for separately in the ledger of Eq. C2-E18.</a:t>
+            </a:r>
+          </a:p>
+        </p:txBody>
+      </p:sp>
+      <p:sp>
+        <p:nvSpPr>
+          <p:cNvPr id="21" name="C2-E19 text 19" descr="sci-ppt:o019"/>
           <p:cNvSpPr txBox="1"/>
           <p:nvPr/>
         </p:nvSpPr>
         <p:spPr>
           <a:xfrm>
-            <a:off x="6156960" y="5266944"/>
-            <a:ext cx="5547360" cy="321259"/>
+            <a:off x="320040" y="6510528"/>
+            <a:ext cx="11521440" cy="200660"/>
           </a:xfrm>
           <a:prstGeom prst="rect">
             <a:avLst/>
@@ -3522,7 +4274,7 @@
           <a:effectLst/>
         </p:spPr>
         <p:txBody>
-          <a:bodyPr wrap="none" lIns="27432" rIns="27432" tIns="18288" bIns="18288" anchor="ctr">
+          <a:bodyPr wrap="none" lIns="18288" rIns="18288" tIns="18288" bIns="18288" anchor="t">
             <a:spAutoFit/>
           </a:bodyPr>
           <a:lstStyle/>
@@ -3533,133 +4285,13 @@
               </a:spcAft>
             </a:pPr>
             <a:r>
-              <a:rPr sz="1632" b="0" i="0">
-                <a:solidFill>
-                  <a:srgbClr val="E7F0F3"/>
-                </a:solidFill>
-                <a:latin typeface="Arial"/>
-              </a:rPr>
-              <a:t>R: complete bubble radius only when applicable</a:t>
-            </a:r>
-          </a:p>
-        </p:txBody>
-      </p:sp>
-      <p:sp>
-        <p:nvSpPr>
-          <p:cNvPr id="14" name="text13" descr="sci-ppt:C2-E19-013"/>
-          <p:cNvSpPr txBox="1"/>
-          <p:nvPr/>
-        </p:nvSpPr>
-        <p:spPr>
-          <a:xfrm>
-            <a:off x="6156960" y="5559552"/>
-            <a:ext cx="5547360" cy="321259"/>
-          </a:xfrm>
-          <a:prstGeom prst="rect">
-            <a:avLst/>
-          </a:prstGeom>
-          <a:noFill/>
-          <a:effectLst/>
-        </p:spPr>
-        <p:txBody>
-          <a:bodyPr wrap="none" lIns="27432" rIns="27432" tIns="18288" bIns="18288" anchor="ctr">
-            <a:spAutoFit/>
-          </a:bodyPr>
-          <a:lstStyle/>
-          <a:p>
-            <a:pPr algn="l">
-              <a:spcAft>
-                <a:spcPts val="0"/>
-              </a:spcAft>
-            </a:pPr>
-            <a:r>
-              <a:rPr sz="1632" b="0" i="0">
-                <a:solidFill>
-                  <a:srgbClr val="E7F0F3"/>
-                </a:solidFill>
-                <a:latin typeface="Arial"/>
-              </a:rPr>
-              <a:t>π: full-sphere special case</a:t>
-            </a:r>
-          </a:p>
-        </p:txBody>
-      </p:sp>
-      <p:sp>
-        <p:nvSpPr>
-          <p:cNvPr id="15" name="text14" descr="sci-ppt:C2-E19-014"/>
-          <p:cNvSpPr txBox="1"/>
-          <p:nvPr/>
-        </p:nvSpPr>
-        <p:spPr>
-          <a:xfrm>
-            <a:off x="365760" y="6278880"/>
-            <a:ext cx="11277600" cy="302361"/>
-          </a:xfrm>
-          <a:prstGeom prst="rect">
-            <a:avLst/>
-          </a:prstGeom>
-          <a:noFill/>
-          <a:effectLst/>
-        </p:spPr>
-        <p:txBody>
-          <a:bodyPr wrap="none" lIns="27432" rIns="27432" tIns="18288" bIns="18288" anchor="ctr">
-            <a:spAutoFit/>
-          </a:bodyPr>
-          <a:lstStyle/>
-          <a:p>
-            <a:pPr algn="l">
-              <a:spcAft>
-                <a:spcPts val="0"/>
-              </a:spcAft>
-            </a:pPr>
-            <a:r>
-              <a:rPr sz="1536" b="0" i="0">
+              <a:rPr sz="1000" b="0" i="0">
                 <a:solidFill>
                   <a:srgbClr val="B4C7D2"/>
                 </a:solidFill>
                 <a:latin typeface="Arial"/>
               </a:rPr>
-              <a:t>PFC may occupy only a residual inclusion</a:t>
-            </a:r>
-          </a:p>
-        </p:txBody>
-      </p:sp>
-      <p:sp>
-        <p:nvSpPr>
-          <p:cNvPr id="16" name="text15" descr="sci-ppt:C2-E19-015"/>
-          <p:cNvSpPr txBox="1"/>
-          <p:nvPr/>
-        </p:nvSpPr>
-        <p:spPr>
-          <a:xfrm>
-            <a:off x="365760" y="6571488"/>
-            <a:ext cx="11277600" cy="302361"/>
-          </a:xfrm>
-          <a:prstGeom prst="rect">
-            <a:avLst/>
-          </a:prstGeom>
-          <a:noFill/>
-          <a:effectLst/>
-        </p:spPr>
-        <p:txBody>
-          <a:bodyPr wrap="none" lIns="27432" rIns="27432" tIns="18288" bIns="18288" anchor="ctr">
-            <a:spAutoFit/>
-          </a:bodyPr>
-          <a:lstStyle/>
-          <a:p>
-            <a:pPr algn="l">
-              <a:spcAft>
-                <a:spcPts val="0"/>
-              </a:spcAft>
-            </a:pPr>
-            <a:r>
-              <a:rPr sz="1536" b="0" i="0">
-                <a:solidFill>
-                  <a:srgbClr val="B4C7D2"/>
-                </a:solidFill>
-                <a:latin typeface="Arial"/>
-              </a:rPr>
-              <a:t>Do not give every species the whole bubble area automatically</a:t>
+              <a:t>Area integral of Eq. C2-E19; sketch is schematic.</a:t>
             </a:r>
           </a:p>
         </p:txBody>
